--- a/Jesus Paid It All_CH.pptx
+++ b/Jesus Paid It All_CH.pptx
@@ -266,7 +266,7 @@
           <a:p>
             <a:fld id="{E759A0DE-F190-5444-87AC-4719D5F20D15}" type="datetimeFigureOut">
               <a:rPr lang="en-US" smtClean="0"/>
-              <a:t>5/31/26</a:t>
+              <a:t>6/6/26</a:t>
             </a:fld>
             <a:endParaRPr lang="en-US"/>
           </a:p>
@@ -464,7 +464,7 @@
           <a:p>
             <a:fld id="{E759A0DE-F190-5444-87AC-4719D5F20D15}" type="datetimeFigureOut">
               <a:rPr lang="en-US" smtClean="0"/>
-              <a:t>5/31/26</a:t>
+              <a:t>6/6/26</a:t>
             </a:fld>
             <a:endParaRPr lang="en-US"/>
           </a:p>
@@ -672,7 +672,7 @@
           <a:p>
             <a:fld id="{E759A0DE-F190-5444-87AC-4719D5F20D15}" type="datetimeFigureOut">
               <a:rPr lang="en-US" smtClean="0"/>
-              <a:t>5/31/26</a:t>
+              <a:t>6/6/26</a:t>
             </a:fld>
             <a:endParaRPr lang="en-US"/>
           </a:p>
@@ -870,7 +870,7 @@
           <a:p>
             <a:fld id="{E759A0DE-F190-5444-87AC-4719D5F20D15}" type="datetimeFigureOut">
               <a:rPr lang="en-US" smtClean="0"/>
-              <a:t>5/31/26</a:t>
+              <a:t>6/6/26</a:t>
             </a:fld>
             <a:endParaRPr lang="en-US"/>
           </a:p>
@@ -1145,7 +1145,7 @@
           <a:p>
             <a:fld id="{E759A0DE-F190-5444-87AC-4719D5F20D15}" type="datetimeFigureOut">
               <a:rPr lang="en-US" smtClean="0"/>
-              <a:t>5/31/26</a:t>
+              <a:t>6/6/26</a:t>
             </a:fld>
             <a:endParaRPr lang="en-US"/>
           </a:p>
@@ -1410,7 +1410,7 @@
           <a:p>
             <a:fld id="{E759A0DE-F190-5444-87AC-4719D5F20D15}" type="datetimeFigureOut">
               <a:rPr lang="en-US" smtClean="0"/>
-              <a:t>5/31/26</a:t>
+              <a:t>6/6/26</a:t>
             </a:fld>
             <a:endParaRPr lang="en-US"/>
           </a:p>
@@ -1822,7 +1822,7 @@
           <a:p>
             <a:fld id="{E759A0DE-F190-5444-87AC-4719D5F20D15}" type="datetimeFigureOut">
               <a:rPr lang="en-US" smtClean="0"/>
-              <a:t>5/31/26</a:t>
+              <a:t>6/6/26</a:t>
             </a:fld>
             <a:endParaRPr lang="en-US"/>
           </a:p>
@@ -1963,7 +1963,7 @@
           <a:p>
             <a:fld id="{E759A0DE-F190-5444-87AC-4719D5F20D15}" type="datetimeFigureOut">
               <a:rPr lang="en-US" smtClean="0"/>
-              <a:t>5/31/26</a:t>
+              <a:t>6/6/26</a:t>
             </a:fld>
             <a:endParaRPr lang="en-US"/>
           </a:p>
@@ -2076,7 +2076,7 @@
           <a:p>
             <a:fld id="{E759A0DE-F190-5444-87AC-4719D5F20D15}" type="datetimeFigureOut">
               <a:rPr lang="en-US" smtClean="0"/>
-              <a:t>5/31/26</a:t>
+              <a:t>6/6/26</a:t>
             </a:fld>
             <a:endParaRPr lang="en-US"/>
           </a:p>
@@ -2387,7 +2387,7 @@
           <a:p>
             <a:fld id="{E759A0DE-F190-5444-87AC-4719D5F20D15}" type="datetimeFigureOut">
               <a:rPr lang="en-US" smtClean="0"/>
-              <a:t>5/31/26</a:t>
+              <a:t>6/6/26</a:t>
             </a:fld>
             <a:endParaRPr lang="en-US"/>
           </a:p>
@@ -2675,7 +2675,7 @@
           <a:p>
             <a:fld id="{E759A0DE-F190-5444-87AC-4719D5F20D15}" type="datetimeFigureOut">
               <a:rPr lang="en-US" smtClean="0"/>
-              <a:t>5/31/26</a:t>
+              <a:t>6/6/26</a:t>
             </a:fld>
             <a:endParaRPr lang="en-US"/>
           </a:p>
@@ -2916,7 +2916,7 @@
           <a:p>
             <a:fld id="{E759A0DE-F190-5444-87AC-4719D5F20D15}" type="datetimeFigureOut">
               <a:rPr lang="en-US" smtClean="0"/>
-              <a:t>5/31/26</a:t>
+              <a:t>6/6/26</a:t>
             </a:fld>
             <a:endParaRPr lang="en-US"/>
           </a:p>

--- a/Jesus Paid It All_CH.pptx
+++ b/Jesus Paid It All_CH.pptx
@@ -13,6 +13,7 @@
     <p:sldId id="287" r:id="rId7"/>
     <p:sldId id="291" r:id="rId8"/>
     <p:sldId id="289" r:id="rId9"/>
+    <p:sldId id="292" r:id="rId10"/>
   </p:sldIdLst>
   <p:sldSz cx="12192000" cy="6858000"/>
   <p:notesSz cx="6858000" cy="9144000"/>
@@ -5064,6 +5065,185 @@
 </p:sld>
 </file>
 
+<file path=ppt/slides/slide9.xml><?xml version="1.0" encoding="utf-8"?>
+<p:sld xmlns:a="http://schemas.openxmlformats.org/drawingml/2006/main" xmlns:r="http://schemas.openxmlformats.org/officeDocument/2006/relationships" xmlns:p="http://schemas.openxmlformats.org/presentationml/2006/main">
+  <p:cSld>
+    <p:bg>
+      <p:bgPr>
+        <a:solidFill>
+          <a:schemeClr val="accent5">
+            <a:lumMod val="50000"/>
+          </a:schemeClr>
+        </a:solidFill>
+        <a:effectLst/>
+      </p:bgPr>
+    </p:bg>
+    <p:spTree>
+      <p:nvGrpSpPr>
+        <p:cNvPr id="1" name="">
+          <a:extLst>
+            <a:ext uri="{FF2B5EF4-FFF2-40B4-BE49-F238E27FC236}">
+              <a16:creationId xmlns:a16="http://schemas.microsoft.com/office/drawing/2014/main" id="{23835649-3967-C48B-278E-320272F08B0E}"/>
+            </a:ext>
+          </a:extLst>
+        </p:cNvPr>
+        <p:cNvGrpSpPr/>
+        <p:nvPr/>
+      </p:nvGrpSpPr>
+      <p:grpSpPr>
+        <a:xfrm>
+          <a:off x="0" y="0"/>
+          <a:ext cx="0" cy="0"/>
+          <a:chOff x="0" y="0"/>
+          <a:chExt cx="0" cy="0"/>
+        </a:xfrm>
+      </p:grpSpPr>
+      <p:sp>
+        <p:nvSpPr>
+          <p:cNvPr id="3" name="Subtitle 2">
+            <a:extLst>
+              <a:ext uri="{FF2B5EF4-FFF2-40B4-BE49-F238E27FC236}">
+                <a16:creationId xmlns:a16="http://schemas.microsoft.com/office/drawing/2014/main" id="{B8DD3981-7533-007E-35B1-A2315436A448}"/>
+              </a:ext>
+            </a:extLst>
+          </p:cNvPr>
+          <p:cNvSpPr>
+            <a:spLocks noGrp="1"/>
+          </p:cNvSpPr>
+          <p:nvPr>
+            <p:ph type="subTitle" idx="1"/>
+          </p:nvPr>
+        </p:nvSpPr>
+        <p:spPr>
+          <a:xfrm>
+            <a:off x="682831" y="497702"/>
+            <a:ext cx="10826338" cy="5862596"/>
+          </a:xfrm>
+        </p:spPr>
+        <p:txBody>
+          <a:bodyPr>
+            <a:noAutofit/>
+          </a:bodyPr>
+          <a:lstStyle/>
+          <a:p>
+            <a:pPr algn="l"/>
+            <a:r>
+              <a:rPr lang="en-US" sz="3600" dirty="0">
+                <a:solidFill>
+                  <a:srgbClr val="FFFF00"/>
+                </a:solidFill>
+                <a:latin typeface="Avenir Medium" panose="02000503020000020003" pitchFamily="2" charset="0"/>
+                <a:ea typeface="Bodoni Ornaments" pitchFamily="2" charset="0"/>
+              </a:rPr>
+              <a:t>C                        Am</a:t>
+            </a:r>
+          </a:p>
+          <a:p>
+            <a:pPr algn="l"/>
+            <a:r>
+              <a:rPr lang="en-US" sz="4400" dirty="0">
+                <a:solidFill>
+                  <a:schemeClr val="bg1"/>
+                </a:solidFill>
+                <a:latin typeface="Avenir Medium" panose="02000503020000020003" pitchFamily="2" charset="0"/>
+                <a:ea typeface="Bodoni Ornaments" pitchFamily="2" charset="0"/>
+              </a:rPr>
+              <a:t>Jesus paid it all</a:t>
+            </a:r>
+          </a:p>
+          <a:p>
+            <a:pPr algn="l"/>
+            <a:r>
+              <a:rPr lang="en-US" sz="3600" dirty="0">
+                <a:solidFill>
+                  <a:srgbClr val="FFFF00"/>
+                </a:solidFill>
+                <a:latin typeface="Avenir Medium" panose="02000503020000020003" pitchFamily="2" charset="0"/>
+                <a:ea typeface="Bodoni Ornaments" pitchFamily="2" charset="0"/>
+              </a:rPr>
+              <a:t>C                     G</a:t>
+            </a:r>
+          </a:p>
+          <a:p>
+            <a:pPr algn="l"/>
+            <a:r>
+              <a:rPr lang="en-US" sz="4400" dirty="0">
+                <a:solidFill>
+                  <a:schemeClr val="bg1"/>
+                </a:solidFill>
+                <a:latin typeface="Avenir Medium" panose="02000503020000020003" pitchFamily="2" charset="0"/>
+                <a:ea typeface="Bodoni Ornaments" pitchFamily="2" charset="0"/>
+              </a:rPr>
+              <a:t>All to Him I owe</a:t>
+            </a:r>
+          </a:p>
+          <a:p>
+            <a:pPr algn="l"/>
+            <a:r>
+              <a:rPr lang="en-US" sz="3600" dirty="0">
+                <a:solidFill>
+                  <a:srgbClr val="FFFF00"/>
+                </a:solidFill>
+                <a:latin typeface="Avenir Medium" panose="02000503020000020003" pitchFamily="2" charset="0"/>
+                <a:ea typeface="Bodoni Ornaments" pitchFamily="2" charset="0"/>
+              </a:rPr>
+              <a:t>C                         F</a:t>
+            </a:r>
+          </a:p>
+          <a:p>
+            <a:pPr algn="l"/>
+            <a:r>
+              <a:rPr lang="en-US" sz="4400" dirty="0">
+                <a:solidFill>
+                  <a:schemeClr val="bg1"/>
+                </a:solidFill>
+                <a:latin typeface="Avenir Medium" panose="02000503020000020003" pitchFamily="2" charset="0"/>
+                <a:ea typeface="Bodoni Ornaments" pitchFamily="2" charset="0"/>
+              </a:rPr>
+              <a:t>Sin had left a crimson stain</a:t>
+            </a:r>
+          </a:p>
+          <a:p>
+            <a:pPr algn="l"/>
+            <a:r>
+              <a:rPr lang="en-US" sz="3600" dirty="0">
+                <a:solidFill>
+                  <a:srgbClr val="FFFF00"/>
+                </a:solidFill>
+                <a:latin typeface="Avenir Medium" panose="02000503020000020003" pitchFamily="2" charset="0"/>
+                <a:ea typeface="Bodoni Ornaments" pitchFamily="2" charset="0"/>
+              </a:rPr>
+              <a:t>       C                  G              C</a:t>
+            </a:r>
+          </a:p>
+          <a:p>
+            <a:pPr algn="l"/>
+            <a:r>
+              <a:rPr lang="en-US" sz="4400" dirty="0">
+                <a:solidFill>
+                  <a:schemeClr val="bg1"/>
+                </a:solidFill>
+                <a:latin typeface="Avenir Medium" panose="02000503020000020003" pitchFamily="2" charset="0"/>
+                <a:ea typeface="Bodoni Ornaments" pitchFamily="2" charset="0"/>
+              </a:rPr>
+              <a:t>He washed it white as snow</a:t>
+            </a:r>
+          </a:p>
+        </p:txBody>
+      </p:sp>
+    </p:spTree>
+    <p:extLst>
+      <p:ext uri="{BB962C8B-B14F-4D97-AF65-F5344CB8AC3E}">
+        <p14:creationId xmlns:p14="http://schemas.microsoft.com/office/powerpoint/2010/main" val="2739631658"/>
+      </p:ext>
+    </p:extLst>
+  </p:cSld>
+  <p:clrMapOvr>
+    <a:masterClrMapping/>
+  </p:clrMapOvr>
+</p:sld>
+</file>
+
 <file path=ppt/theme/theme1.xml><?xml version="1.0" encoding="utf-8"?>
 <a:theme xmlns:a="http://schemas.openxmlformats.org/drawingml/2006/main" name="Office Theme">
   <a:themeElements>

--- a/Jesus Paid It All_CH.pptx
+++ b/Jesus Paid It All_CH.pptx
@@ -13,6 +13,7 @@
     <p:sldId id="287" r:id="rId7"/>
     <p:sldId id="291" r:id="rId8"/>
     <p:sldId id="289" r:id="rId9"/>
+    <p:sldId id="292" r:id="rId10"/>
   </p:sldIdLst>
   <p:sldSz cx="12192000" cy="6858000"/>
   <p:notesSz cx="6858000" cy="9144000"/>
@@ -5064,6 +5065,185 @@
 </p:sld>
 </file>
 
+<file path=ppt/slides/slide9.xml><?xml version="1.0" encoding="utf-8"?>
+<p:sld xmlns:a="http://schemas.openxmlformats.org/drawingml/2006/main" xmlns:r="http://schemas.openxmlformats.org/officeDocument/2006/relationships" xmlns:p="http://schemas.openxmlformats.org/presentationml/2006/main">
+  <p:cSld>
+    <p:bg>
+      <p:bgPr>
+        <a:solidFill>
+          <a:schemeClr val="accent5">
+            <a:lumMod val="50000"/>
+          </a:schemeClr>
+        </a:solidFill>
+        <a:effectLst/>
+      </p:bgPr>
+    </p:bg>
+    <p:spTree>
+      <p:nvGrpSpPr>
+        <p:cNvPr id="1" name="">
+          <a:extLst>
+            <a:ext uri="{FF2B5EF4-FFF2-40B4-BE49-F238E27FC236}">
+              <a16:creationId xmlns:a16="http://schemas.microsoft.com/office/drawing/2014/main" id="{98B87B35-4FE6-D26D-0496-F6EB0B84183E}"/>
+            </a:ext>
+          </a:extLst>
+        </p:cNvPr>
+        <p:cNvGrpSpPr/>
+        <p:nvPr/>
+      </p:nvGrpSpPr>
+      <p:grpSpPr>
+        <a:xfrm>
+          <a:off x="0" y="0"/>
+          <a:ext cx="0" cy="0"/>
+          <a:chOff x="0" y="0"/>
+          <a:chExt cx="0" cy="0"/>
+        </a:xfrm>
+      </p:grpSpPr>
+      <p:sp>
+        <p:nvSpPr>
+          <p:cNvPr id="3" name="Subtitle 2">
+            <a:extLst>
+              <a:ext uri="{FF2B5EF4-FFF2-40B4-BE49-F238E27FC236}">
+                <a16:creationId xmlns:a16="http://schemas.microsoft.com/office/drawing/2014/main" id="{3D890FC1-A7A1-35A6-E8C4-E66C75FD7C0E}"/>
+              </a:ext>
+            </a:extLst>
+          </p:cNvPr>
+          <p:cNvSpPr>
+            <a:spLocks noGrp="1"/>
+          </p:cNvSpPr>
+          <p:nvPr>
+            <p:ph type="subTitle" idx="1"/>
+          </p:nvPr>
+        </p:nvSpPr>
+        <p:spPr>
+          <a:xfrm>
+            <a:off x="682831" y="497702"/>
+            <a:ext cx="10826338" cy="5862596"/>
+          </a:xfrm>
+        </p:spPr>
+        <p:txBody>
+          <a:bodyPr>
+            <a:noAutofit/>
+          </a:bodyPr>
+          <a:lstStyle/>
+          <a:p>
+            <a:pPr algn="l"/>
+            <a:r>
+              <a:rPr lang="en-US" sz="3600" dirty="0">
+                <a:solidFill>
+                  <a:srgbClr val="FFFF00"/>
+                </a:solidFill>
+                <a:latin typeface="Avenir Medium" panose="02000503020000020003" pitchFamily="2" charset="0"/>
+                <a:ea typeface="Bodoni Ornaments" pitchFamily="2" charset="0"/>
+              </a:rPr>
+              <a:t>C                        Am</a:t>
+            </a:r>
+          </a:p>
+          <a:p>
+            <a:pPr algn="l"/>
+            <a:r>
+              <a:rPr lang="en-US" sz="4400" dirty="0">
+                <a:solidFill>
+                  <a:schemeClr val="bg1"/>
+                </a:solidFill>
+                <a:latin typeface="Avenir Medium" panose="02000503020000020003" pitchFamily="2" charset="0"/>
+                <a:ea typeface="Bodoni Ornaments" pitchFamily="2" charset="0"/>
+              </a:rPr>
+              <a:t>Jesus paid it all</a:t>
+            </a:r>
+          </a:p>
+          <a:p>
+            <a:pPr algn="l"/>
+            <a:r>
+              <a:rPr lang="en-US" sz="3600" dirty="0">
+                <a:solidFill>
+                  <a:srgbClr val="FFFF00"/>
+                </a:solidFill>
+                <a:latin typeface="Avenir Medium" panose="02000503020000020003" pitchFamily="2" charset="0"/>
+                <a:ea typeface="Bodoni Ornaments" pitchFamily="2" charset="0"/>
+              </a:rPr>
+              <a:t>C                     G</a:t>
+            </a:r>
+          </a:p>
+          <a:p>
+            <a:pPr algn="l"/>
+            <a:r>
+              <a:rPr lang="en-US" sz="4400" dirty="0">
+                <a:solidFill>
+                  <a:schemeClr val="bg1"/>
+                </a:solidFill>
+                <a:latin typeface="Avenir Medium" panose="02000503020000020003" pitchFamily="2" charset="0"/>
+                <a:ea typeface="Bodoni Ornaments" pitchFamily="2" charset="0"/>
+              </a:rPr>
+              <a:t>All to Him I owe</a:t>
+            </a:r>
+          </a:p>
+          <a:p>
+            <a:pPr algn="l"/>
+            <a:r>
+              <a:rPr lang="en-US" sz="3600" dirty="0">
+                <a:solidFill>
+                  <a:srgbClr val="FFFF00"/>
+                </a:solidFill>
+                <a:latin typeface="Avenir Medium" panose="02000503020000020003" pitchFamily="2" charset="0"/>
+                <a:ea typeface="Bodoni Ornaments" pitchFamily="2" charset="0"/>
+              </a:rPr>
+              <a:t>C                         F</a:t>
+            </a:r>
+          </a:p>
+          <a:p>
+            <a:pPr algn="l"/>
+            <a:r>
+              <a:rPr lang="en-US" sz="4400" dirty="0">
+                <a:solidFill>
+                  <a:schemeClr val="bg1"/>
+                </a:solidFill>
+                <a:latin typeface="Avenir Medium" panose="02000503020000020003" pitchFamily="2" charset="0"/>
+                <a:ea typeface="Bodoni Ornaments" pitchFamily="2" charset="0"/>
+              </a:rPr>
+              <a:t>Sin had left a crimson stain</a:t>
+            </a:r>
+          </a:p>
+          <a:p>
+            <a:pPr algn="l"/>
+            <a:r>
+              <a:rPr lang="en-US" sz="3600" dirty="0">
+                <a:solidFill>
+                  <a:srgbClr val="FFFF00"/>
+                </a:solidFill>
+                <a:latin typeface="Avenir Medium" panose="02000503020000020003" pitchFamily="2" charset="0"/>
+                <a:ea typeface="Bodoni Ornaments" pitchFamily="2" charset="0"/>
+              </a:rPr>
+              <a:t>       C                  G              C</a:t>
+            </a:r>
+          </a:p>
+          <a:p>
+            <a:pPr algn="l"/>
+            <a:r>
+              <a:rPr lang="en-US" sz="4400" dirty="0">
+                <a:solidFill>
+                  <a:schemeClr val="bg1"/>
+                </a:solidFill>
+                <a:latin typeface="Avenir Medium" panose="02000503020000020003" pitchFamily="2" charset="0"/>
+                <a:ea typeface="Bodoni Ornaments" pitchFamily="2" charset="0"/>
+              </a:rPr>
+              <a:t>He washed it white as snow</a:t>
+            </a:r>
+          </a:p>
+        </p:txBody>
+      </p:sp>
+    </p:spTree>
+    <p:extLst>
+      <p:ext uri="{BB962C8B-B14F-4D97-AF65-F5344CB8AC3E}">
+        <p14:creationId xmlns:p14="http://schemas.microsoft.com/office/powerpoint/2010/main" val="1585907750"/>
+      </p:ext>
+    </p:extLst>
+  </p:cSld>
+  <p:clrMapOvr>
+    <a:masterClrMapping/>
+  </p:clrMapOvr>
+</p:sld>
+</file>
+
 <file path=ppt/theme/theme1.xml><?xml version="1.0" encoding="utf-8"?>
 <a:theme xmlns:a="http://schemas.openxmlformats.org/drawingml/2006/main" name="Office Theme">
   <a:themeElements>
